--- a/Attack/Prompt_Stealing/Diffusion/论文作图.pptx
+++ b/Attack/Prompt_Stealing/Diffusion/论文作图.pptx
@@ -3694,7 +3694,7 @@
         </p:blipFill>
         <p:spPr>
           <a:xfrm>
-            <a:off x="2121535" y="1309370"/>
+            <a:off x="2756535" y="801370"/>
             <a:ext cx="7355205" cy="3922395"/>
           </a:xfrm>
           <a:prstGeom prst="rect">
@@ -3714,7 +3714,7 @@
         </p:nvSpPr>
         <p:spPr>
           <a:xfrm>
-            <a:off x="3804285" y="1134110"/>
+            <a:off x="4439285" y="626110"/>
             <a:ext cx="3476625" cy="747395"/>
           </a:xfrm>
           <a:prstGeom prst="rect">
@@ -3758,7 +3758,7 @@
                 <a:ea typeface="微软雅黑" charset="0"/>
                 <a:cs typeface="微软雅黑" charset="0"/>
               </a:rPr>
-              <a:t>CLIP</a:t>
+              <a:t>BLIP</a:t>
             </a:r>
             <a:r>
               <a:rPr lang="zh-CN" altLang="en-US" sz="1200" b="1">
@@ -3843,7 +3843,7 @@
         </p:nvSpPr>
         <p:spPr>
           <a:xfrm>
-            <a:off x="3804285" y="5325110"/>
+            <a:off x="4439285" y="4817110"/>
             <a:ext cx="3476625" cy="427355"/>
           </a:xfrm>
           <a:prstGeom prst="rect">
@@ -3943,7 +3943,23 @@
                 <a:ea typeface="微软雅黑" charset="0"/>
                 <a:cs typeface="微软雅黑" charset="0"/>
               </a:rPr>
-              <a:t>如果大于某个阈值（比如 0.5），就认为这个修饰词出现在图中。</a:t>
+              <a:t>如果大于</a:t>
+            </a:r>
+            <a:r>
+              <a:rPr lang="en-US" altLang="zh-CN" sz="1200" b="1">
+                <a:latin typeface="微软雅黑" charset="0"/>
+                <a:ea typeface="微软雅黑" charset="0"/>
+                <a:cs typeface="微软雅黑" charset="0"/>
+              </a:rPr>
+              <a:t>0.6</a:t>
+            </a:r>
+            <a:r>
+              <a:rPr lang="zh-CN" altLang="en-US" sz="1200" b="1">
+                <a:latin typeface="微软雅黑" charset="0"/>
+                <a:ea typeface="微软雅黑" charset="0"/>
+                <a:cs typeface="微软雅黑" charset="0"/>
+              </a:rPr>
+              <a:t>，就认为这个修饰词出现在图中。</a:t>
             </a:r>
             <a:endParaRPr lang="zh-CN" altLang="en-US" sz="1200" b="1">
               <a:latin typeface="微软雅黑" charset="0"/>
